--- a/r/cots/cotsanil.pptx
+++ b/r/cots/cotsanil.pptx
@@ -281,7 +281,7 @@
           <a:p>
             <a:fld id="{9D8190EA-5EEC-4300-B6AE-D9734C6C648E}" type="datetimeFigureOut">
               <a:rPr lang="en-US" smtClean="0"/>
-              <a:t>5/28/2025</a:t>
+              <a:t>7/24/2026</a:t>
             </a:fld>
             <a:endParaRPr lang="en-US"/>
           </a:p>
@@ -458,7 +458,7 @@
           <a:p>
             <a:fld id="{7487ADD9-2083-264C-A652-8D52D02F7E72}" type="datetimeFigureOut">
               <a:rPr lang="en-US" smtClean="0"/>
-              <a:t>5/28/2025</a:t>
+              <a:t>7/24/2026</a:t>
             </a:fld>
             <a:endParaRPr lang="en-US"/>
           </a:p>
@@ -5409,7 +5409,7 @@
           <a:p>
             <a:fld id="{7CC70CF7-838D-41F7-9297-B5F83BDCEB13}" type="datetimeFigureOut">
               <a:rPr lang="en-US" dirty="0"/>
-              <a:t>5/28/2025</a:t>
+              <a:t>7/24/2026</a:t>
             </a:fld>
             <a:endParaRPr lang="en-US" dirty="0"/>
           </a:p>
@@ -5535,10 +5535,10 @@
               </a:pathLst>
             </a:custGeom>
             <a:blipFill dpi="0" rotWithShape="1">
-              <a:blip r:embed="rId2">
+              <a:blip>
                 <a:extLst>
                   <a:ext uri="{96DAC541-7B7A-43D3-8B79-37D633B846F1}">
-                    <asvg:svgBlip xmlns:asvg="http://schemas.microsoft.com/office/drawing/2016/SVG/main" r:embed="rId3"/>
+                    <asvg:svgBlip xmlns:asvg="http://schemas.microsoft.com/office/drawing/2016/SVG/main" r:embed="rId2"/>
                   </a:ext>
                 </a:extLst>
               </a:blip>
@@ -5760,7 +5760,7 @@
           <a:p>
             <a:fld id="{F836330A-4522-49F4-ACCE-A07321703478}" type="datetimeFigureOut">
               <a:rPr lang="en-US" dirty="0"/>
-              <a:t>5/28/2025</a:t>
+              <a:t>7/24/2026</a:t>
             </a:fld>
             <a:endParaRPr lang="en-US" dirty="0"/>
           </a:p>
@@ -5886,10 +5886,10 @@
               </a:pathLst>
             </a:custGeom>
             <a:blipFill dpi="0" rotWithShape="1">
-              <a:blip r:embed="rId2">
+              <a:blip>
                 <a:extLst>
                   <a:ext uri="{96DAC541-7B7A-43D3-8B79-37D633B846F1}">
-                    <asvg:svgBlip xmlns:asvg="http://schemas.microsoft.com/office/drawing/2016/SVG/main" r:embed="rId3"/>
+                    <asvg:svgBlip xmlns:asvg="http://schemas.microsoft.com/office/drawing/2016/SVG/main" r:embed="rId2"/>
                   </a:ext>
                 </a:extLst>
               </a:blip>
@@ -6116,7 +6116,7 @@
           <a:p>
             <a:fld id="{75EC5DDF-A796-4D56-9973-341789785817}" type="datetimeFigureOut">
               <a:rPr lang="en-US" dirty="0"/>
-              <a:t>5/28/2025</a:t>
+              <a:t>7/24/2026</a:t>
             </a:fld>
             <a:endParaRPr lang="en-US" dirty="0"/>
           </a:p>
@@ -6242,10 +6242,10 @@
               </a:pathLst>
             </a:custGeom>
             <a:blipFill dpi="0" rotWithShape="1">
-              <a:blip r:embed="rId2">
+              <a:blip>
                 <a:extLst>
                   <a:ext uri="{96DAC541-7B7A-43D3-8B79-37D633B846F1}">
-                    <asvg:svgBlip xmlns:asvg="http://schemas.microsoft.com/office/drawing/2016/SVG/main" r:embed="rId3"/>
+                    <asvg:svgBlip xmlns:asvg="http://schemas.microsoft.com/office/drawing/2016/SVG/main" r:embed="rId2"/>
                   </a:ext>
                 </a:extLst>
               </a:blip>
@@ -8783,7 +8783,7 @@
           <a:p>
             <a:fld id="{254069DA-BCAC-469D-B81F-5CD529FD1EE6}" type="datetimeFigureOut">
               <a:rPr lang="en-US" dirty="0"/>
-              <a:t>5/28/2025</a:t>
+              <a:t>7/24/2026</a:t>
             </a:fld>
             <a:endParaRPr lang="en-US" dirty="0"/>
           </a:p>
@@ -9120,7 +9120,7 @@
           <a:p>
             <a:fld id="{3134B3F2-5297-4D62-BDB7-590764A696AF}" type="datetimeFigureOut">
               <a:rPr lang="en-US" dirty="0"/>
-              <a:t>5/28/2025</a:t>
+              <a:t>7/24/2026</a:t>
             </a:fld>
             <a:endParaRPr lang="en-US" dirty="0"/>
           </a:p>
@@ -9447,7 +9447,7 @@
           <a:p>
             <a:fld id="{80D0FAC0-A4F5-4A85-98AE-9E6BDD843B92}" type="datetimeFigureOut">
               <a:rPr lang="en-US" dirty="0"/>
-              <a:t>5/28/2025</a:t>
+              <a:t>7/24/2026</a:t>
             </a:fld>
             <a:endParaRPr lang="en-US" dirty="0"/>
           </a:p>
@@ -9931,7 +9931,7 @@
           <a:p>
             <a:fld id="{491F58DF-B20E-4829-8712-7D40EB90064E}" type="datetimeFigureOut">
               <a:rPr lang="en-US" dirty="0"/>
-              <a:t>5/28/2025</a:t>
+              <a:t>7/24/2026</a:t>
             </a:fld>
             <a:endParaRPr lang="en-US" dirty="0"/>
           </a:p>
@@ -10096,7 +10096,7 @@
           <a:p>
             <a:fld id="{4F952F2A-FD05-43F8-9927-AF9F6AA75EA1}" type="datetimeFigureOut">
               <a:rPr lang="en-US" dirty="0"/>
-              <a:t>5/28/2025</a:t>
+              <a:t>7/24/2026</a:t>
             </a:fld>
             <a:endParaRPr lang="en-US" dirty="0"/>
           </a:p>
@@ -10213,7 +10213,7 @@
           <a:p>
             <a:fld id="{8C112728-8AF2-421E-A3EE-3D32DADA7E63}" type="datetimeFigureOut">
               <a:rPr lang="en-US" dirty="0"/>
-              <a:t>5/28/2025</a:t>
+              <a:t>7/24/2026</a:t>
             </a:fld>
             <a:endParaRPr lang="en-US" dirty="0"/>
           </a:p>
@@ -10538,7 +10538,7 @@
           <a:p>
             <a:fld id="{BAF64D57-1513-4084-818F-075C9D0922CD}" type="datetimeFigureOut">
               <a:rPr lang="en-US" dirty="0"/>
-              <a:t>5/28/2025</a:t>
+              <a:t>7/24/2026</a:t>
             </a:fld>
             <a:endParaRPr lang="en-US" dirty="0"/>
           </a:p>
@@ -10840,7 +10840,7 @@
           <a:p>
             <a:fld id="{4B51DC6D-53F2-404B-944C-46E1F58C3149}" type="datetimeFigureOut">
               <a:rPr lang="en-US" dirty="0"/>
-              <a:t>5/28/2025</a:t>
+              <a:t>7/24/2026</a:t>
             </a:fld>
             <a:endParaRPr lang="en-US" dirty="0"/>
           </a:p>
@@ -11083,7 +11083,7 @@
           <a:p>
             <a:fld id="{3716B609-2A26-46AA-B595-3671F5470576}" type="datetimeFigureOut">
               <a:rPr lang="en-US" dirty="0"/>
-              <a:t>5/28/2025</a:t>
+              <a:t>7/24/2026</a:t>
             </a:fld>
             <a:endParaRPr lang="en-US" dirty="0"/>
           </a:p>
@@ -11241,10 +11241,10 @@
               </a:pathLst>
             </a:custGeom>
             <a:blipFill dpi="0" rotWithShape="1">
-              <a:blip r:embed="rId16">
+              <a:blip>
                 <a:extLst>
                   <a:ext uri="{96DAC541-7B7A-43D3-8B79-37D633B846F1}">
-                    <asvg:svgBlip xmlns:asvg="http://schemas.microsoft.com/office/drawing/2016/SVG/main" r:embed="rId17"/>
+                    <asvg:svgBlip xmlns:asvg="http://schemas.microsoft.com/office/drawing/2016/SVG/main" r:embed="rId16"/>
                   </a:ext>
                 </a:extLst>
               </a:blip>
@@ -11822,7 +11822,7 @@
               </a:spcBef>
             </a:pPr>
             <a:r>
-              <a:rPr lang="en-US" sz="3000">
+              <a:rPr lang="en-US" sz="3000" dirty="0">
                 <a:latin typeface="FrankRuehl"/>
                 <a:cs typeface="FrankRuehl"/>
               </a:rPr>
@@ -11839,11 +11839,11 @@
               </a:spcBef>
             </a:pPr>
             <a:r>
-              <a:rPr lang="en-US" sz="3000">
+              <a:rPr lang="en-US" sz="3000" dirty="0">
                 <a:latin typeface="FrankRuehl"/>
                 <a:cs typeface="FrankRuehl"/>
               </a:rPr>
-              <a:t>📅 May 29, 2025 (Thursday) </a:t>
+              <a:t>📅 July 25, 2026 (Saturday) </a:t>
             </a:r>
           </a:p>
           <a:p>
@@ -11856,19 +11856,33 @@
               </a:spcBef>
             </a:pPr>
             <a:r>
+              <a:rPr lang="en-US" sz="3000" dirty="0">
+                <a:latin typeface="FrankRuehl"/>
+                <a:cs typeface="FrankRuehl"/>
+              </a:rPr>
+              <a:t>🕘 </a:t>
+            </a:r>
+            <a:r>
               <a:rPr lang="en-US" sz="3000">
                 <a:latin typeface="FrankRuehl"/>
                 <a:cs typeface="FrankRuehl"/>
               </a:rPr>
-              <a:t>🕘 01:00 P.M.</a:t>
-            </a:r>
-            <a:endParaRPr lang="en-US">
+              <a:t>11:00 A.</a:t>
+            </a:r>
+            <a:r>
+              <a:rPr lang="en-US" sz="3000" dirty="0">
+                <a:latin typeface="FrankRuehl"/>
+                <a:cs typeface="FrankRuehl"/>
+              </a:rPr>
+              <a:t>M.</a:t>
+            </a:r>
+            <a:endParaRPr lang="en-US" dirty="0">
               <a:latin typeface="FrankRuehl"/>
               <a:cs typeface="FrankRuehl"/>
             </a:endParaRPr>
           </a:p>
           <a:p>
-            <a:endParaRPr lang="en-US"/>
+            <a:endParaRPr lang="en-US" dirty="0"/>
           </a:p>
         </p:txBody>
       </p:sp>
@@ -27102,35 +27116,6 @@
 </file>
 
 <file path=customXml/item1.xml><?xml version="1.0" encoding="utf-8"?>
-<p:properties xmlns:p="http://schemas.microsoft.com/office/2006/metadata/properties" xmlns:xsi="http://www.w3.org/2001/XMLSchema-instance" xmlns:pc="http://schemas.microsoft.com/office/infopath/2007/PartnerControls">
-  <documentManagement>
-    <_ip_UnifiedCompliancePolicyUIAction xmlns="http://schemas.microsoft.com/sharepoint/v3" xsi:nil="true"/>
-    <Image xmlns="71af3243-3dd4-4a8d-8c0d-dd76da1f02a5">
-      <Url xsi:nil="true"/>
-      <Description xsi:nil="true"/>
-    </Image>
-    <Status xmlns="71af3243-3dd4-4a8d-8c0d-dd76da1f02a5">Not started</Status>
-    <Background xmlns="71af3243-3dd4-4a8d-8c0d-dd76da1f02a5">false</Background>
-    <_ip_UnifiedCompliancePolicyProperties xmlns="http://schemas.microsoft.com/sharepoint/v3" xsi:nil="true"/>
-    <ImageTagsTaxHTField xmlns="71af3243-3dd4-4a8d-8c0d-dd76da1f02a5">
-      <Terms xmlns="http://schemas.microsoft.com/office/infopath/2007/PartnerControls"/>
-    </ImageTagsTaxHTField>
-    <TaxCatchAll xmlns="230e9df3-be65-4c73-a93b-d1236ebd677e" xsi:nil="true"/>
-    <MediaServiceKeyPoints xmlns="71af3243-3dd4-4a8d-8c0d-dd76da1f02a5" xsi:nil="true"/>
-  </documentManagement>
-</p:properties>
-</file>
-
-<file path=customXml/item2.xml><?xml version="1.0" encoding="utf-8"?>
-<?mso-contentType ?>
-<FormTemplates xmlns="http://schemas.microsoft.com/sharepoint/v3/contenttype/forms">
-  <Display>DocumentLibraryForm</Display>
-  <Edit>DocumentLibraryForm</Edit>
-  <New>DocumentLibraryForm</New>
-</FormTemplates>
-</file>
-
-<file path=customXml/item3.xml><?xml version="1.0" encoding="utf-8"?>
 <ct:contentTypeSchema xmlns:ct="http://schemas.microsoft.com/office/2006/metadata/contentType" xmlns:ma="http://schemas.microsoft.com/office/2006/metadata/properties/metaAttributes" ct:_="" ma:_="" ma:contentTypeName="Document" ma:contentTypeID="0x01010079F111ED35F8CC479449609E8A0923A6" ma:contentTypeVersion="28" ma:contentTypeDescription="Create a new document." ma:contentTypeScope="" ma:versionID="60f5a4f2d2b0abadcf532d48ebf9cb71">
   <xsd:schema xmlns:xsd="http://www.w3.org/2001/XMLSchema" xmlns:xs="http://www.w3.org/2001/XMLSchema" xmlns:p="http://schemas.microsoft.com/office/2006/metadata/properties" xmlns:ns1="http://schemas.microsoft.com/sharepoint/v3" xmlns:ns2="71af3243-3dd4-4a8d-8c0d-dd76da1f02a5" xmlns:ns3="16c05727-aa75-4e4a-9b5f-8a80a1165891" xmlns:ns4="230e9df3-be65-4c73-a93b-d1236ebd677e" targetNamespace="http://schemas.microsoft.com/office/2006/metadata/properties" ma:root="true" ma:fieldsID="7dd78129e6a1811f84807ad11c651531" ns1:_="" ns2:_="" ns3:_="" ns4:_="">
     <xsd:import namespace="http://schemas.microsoft.com/sharepoint/v3"/>
@@ -27442,27 +27427,36 @@
 </ct:contentTypeSchema>
 </file>
 
-<file path=customXml/itemProps1.xml><?xml version="1.0" encoding="utf-8"?>
-<ds:datastoreItem xmlns:ds="http://schemas.openxmlformats.org/officeDocument/2006/customXml" ds:itemID="{3CE52C7A-8834-4F18-859F-7167A187E138}">
-  <ds:schemaRefs>
-    <ds:schemaRef ds:uri="230e9df3-be65-4c73-a93b-d1236ebd677e"/>
-    <ds:schemaRef ds:uri="71af3243-3dd4-4a8d-8c0d-dd76da1f02a5"/>
-    <ds:schemaRef ds:uri="http://schemas.microsoft.com/office/2006/metadata/properties"/>
-    <ds:schemaRef ds:uri="http://schemas.microsoft.com/office/infopath/2007/PartnerControls"/>
-    <ds:schemaRef ds:uri="http://schemas.microsoft.com/sharepoint/v3"/>
-  </ds:schemaRefs>
-</ds:datastoreItem>
+<file path=customXml/item2.xml><?xml version="1.0" encoding="utf-8"?>
+<p:properties xmlns:p="http://schemas.microsoft.com/office/2006/metadata/properties" xmlns:xsi="http://www.w3.org/2001/XMLSchema-instance" xmlns:pc="http://schemas.microsoft.com/office/infopath/2007/PartnerControls">
+  <documentManagement>
+    <_ip_UnifiedCompliancePolicyUIAction xmlns="http://schemas.microsoft.com/sharepoint/v3" xsi:nil="true"/>
+    <Image xmlns="71af3243-3dd4-4a8d-8c0d-dd76da1f02a5">
+      <Url xsi:nil="true"/>
+      <Description xsi:nil="true"/>
+    </Image>
+    <Status xmlns="71af3243-3dd4-4a8d-8c0d-dd76da1f02a5">Not started</Status>
+    <Background xmlns="71af3243-3dd4-4a8d-8c0d-dd76da1f02a5">false</Background>
+    <_ip_UnifiedCompliancePolicyProperties xmlns="http://schemas.microsoft.com/sharepoint/v3" xsi:nil="true"/>
+    <ImageTagsTaxHTField xmlns="71af3243-3dd4-4a8d-8c0d-dd76da1f02a5">
+      <Terms xmlns="http://schemas.microsoft.com/office/infopath/2007/PartnerControls"/>
+    </ImageTagsTaxHTField>
+    <TaxCatchAll xmlns="230e9df3-be65-4c73-a93b-d1236ebd677e" xsi:nil="true"/>
+    <MediaServiceKeyPoints xmlns="71af3243-3dd4-4a8d-8c0d-dd76da1f02a5" xsi:nil="true"/>
+  </documentManagement>
+</p:properties>
 </file>
 
-<file path=customXml/itemProps2.xml><?xml version="1.0" encoding="utf-8"?>
-<ds:datastoreItem xmlns:ds="http://schemas.openxmlformats.org/officeDocument/2006/customXml" ds:itemID="{731D3D4E-040D-4F59-9215-B1F04B81B9FE}">
-  <ds:schemaRefs>
-    <ds:schemaRef ds:uri="http://schemas.microsoft.com/sharepoint/v3/contenttype/forms"/>
-  </ds:schemaRefs>
-</ds:datastoreItem>
+<file path=customXml/item3.xml><?xml version="1.0" encoding="utf-8"?>
+<?mso-contentType ?>
+<FormTemplates xmlns="http://schemas.microsoft.com/sharepoint/v3/contenttype/forms">
+  <Display>DocumentLibraryForm</Display>
+  <Edit>DocumentLibraryForm</Edit>
+  <New>DocumentLibraryForm</New>
+</FormTemplates>
 </file>
 
-<file path=customXml/itemProps3.xml><?xml version="1.0" encoding="utf-8"?>
+<file path=customXml/itemProps1.xml><?xml version="1.0" encoding="utf-8"?>
 <ds:datastoreItem xmlns:ds="http://schemas.openxmlformats.org/officeDocument/2006/customXml" ds:itemID="{5A7188B1-CB43-4216-A332-EE7733BC2215}">
   <ds:schemaRefs>
     <ds:schemaRef ds:uri="16c05727-aa75-4e4a-9b5f-8a80a1165891"/>
@@ -27483,6 +27477,26 @@
 </ds:datastoreItem>
 </file>
 
+<file path=customXml/itemProps2.xml><?xml version="1.0" encoding="utf-8"?>
+<ds:datastoreItem xmlns:ds="http://schemas.openxmlformats.org/officeDocument/2006/customXml" ds:itemID="{3CE52C7A-8834-4F18-859F-7167A187E138}">
+  <ds:schemaRefs>
+    <ds:schemaRef ds:uri="230e9df3-be65-4c73-a93b-d1236ebd677e"/>
+    <ds:schemaRef ds:uri="71af3243-3dd4-4a8d-8c0d-dd76da1f02a5"/>
+    <ds:schemaRef ds:uri="http://schemas.microsoft.com/office/2006/metadata/properties"/>
+    <ds:schemaRef ds:uri="http://schemas.microsoft.com/office/infopath/2007/PartnerControls"/>
+    <ds:schemaRef ds:uri="http://schemas.microsoft.com/sharepoint/v3"/>
+  </ds:schemaRefs>
+</ds:datastoreItem>
+</file>
+
+<file path=customXml/itemProps3.xml><?xml version="1.0" encoding="utf-8"?>
+<ds:datastoreItem xmlns:ds="http://schemas.openxmlformats.org/officeDocument/2006/customXml" ds:itemID="{731D3D4E-040D-4F59-9215-B1F04B81B9FE}">
+  <ds:schemaRefs>
+    <ds:schemaRef ds:uri="http://schemas.microsoft.com/sharepoint/v3/contenttype/forms"/>
+  </ds:schemaRefs>
+</ds:datastoreItem>
+</file>
+
 <file path=docMetadata/LabelInfo.xml><?xml version="1.0" encoding="utf-8"?>
 <clbl:labelList xmlns:clbl="http://schemas.microsoft.com/office/2020/mipLabelMetadata"/>
 </file>